--- a/autumn/sem_3_compiler/presentations/Семинар_3.pptx
+++ b/autumn/sem_3_compiler/presentations/Семинар_3.pptx
@@ -218,7 +218,7 @@
           <a:p>
             <a:fld id="{1D8BD707-D9CF-40AE-B4C6-C98DA3205C09}" type="datetimeFigureOut">
               <a:rPr lang="en-US"/>
-              <a:t>9/14/2025</a:t>
+              <a:t>9/21/2025</a:t>
             </a:fld>
             <a:endParaRPr lang="en-US"/>
           </a:p>
@@ -395,7 +395,7 @@
           <a:p>
             <a:fld id="{1D8BD707-D9CF-40AE-B4C6-C98DA3205C09}" type="datetimeFigureOut">
               <a:rPr lang="en-US"/>
-              <a:t>9/14/2025</a:t>
+              <a:t>9/21/2025</a:t>
             </a:fld>
             <a:endParaRPr lang="en-US"/>
           </a:p>
@@ -609,7 +609,7 @@
           <a:p>
             <a:fld id="{1D8BD707-D9CF-40AE-B4C6-C98DA3205C09}" type="datetimeFigureOut">
               <a:rPr lang="en-US"/>
-              <a:t>9/14/2025</a:t>
+              <a:t>9/21/2025</a:t>
             </a:fld>
             <a:endParaRPr lang="en-US"/>
           </a:p>
@@ -757,7 +757,7 @@
           <a:p>
             <a:fld id="{1D8BD707-D9CF-40AE-B4C6-C98DA3205C09}" type="datetimeFigureOut">
               <a:rPr lang="en-US"/>
-              <a:t>9/14/2025</a:t>
+              <a:t>9/21/2025</a:t>
             </a:fld>
             <a:endParaRPr lang="en-US"/>
           </a:p>
@@ -876,7 +876,7 @@
           <a:p>
             <a:fld id="{1D8BD707-D9CF-40AE-B4C6-C98DA3205C09}" type="datetimeFigureOut">
               <a:rPr lang="en-US"/>
-              <a:t>9/14/2025</a:t>
+              <a:t>9/21/2025</a:t>
             </a:fld>
             <a:endParaRPr lang="en-US"/>
           </a:p>
@@ -1101,7 +1101,7 @@
           <a:p>
             <a:fld id="{1D8BD707-D9CF-40AE-B4C6-C98DA3205C09}" type="datetimeFigureOut">
               <a:rPr lang="en-US"/>
-              <a:t>9/14/2025</a:t>
+              <a:t>9/21/2025</a:t>
             </a:fld>
             <a:endParaRPr lang="en-US"/>
           </a:p>
@@ -2466,7 +2466,7 @@
         <p:spPr>
           <a:xfrm>
             <a:off x="916939" y="1724393"/>
-            <a:ext cx="8915400" cy="3995966"/>
+            <a:ext cx="8915400" cy="4488408"/>
           </a:xfrm>
           <a:prstGeom prst="rect">
             <a:avLst/>
@@ -2719,9 +2719,31 @@
               <a:t>-</a:t>
             </a:r>
             <a:r>
-              <a:rPr spc="-25" dirty="0"/>
+              <a:rPr spc="-25" dirty="0" err="1"/>
               <a:t>Og</a:t>
             </a:r>
+            <a:endParaRPr lang="en-US" spc="-25" dirty="0"/>
+          </a:p>
+          <a:p>
+            <a:pPr marL="240029" indent="-227329">
+              <a:lnSpc>
+                <a:spcPct val="100000"/>
+              </a:lnSpc>
+              <a:spcBef>
+                <a:spcPts val="645"/>
+              </a:spcBef>
+              <a:buChar char="•"/>
+              <a:tabLst>
+                <a:tab pos="240029" algn="l"/>
+              </a:tabLst>
+            </a:pPr>
+            <a:r>
+              <a:rPr lang="en-US" spc="-25" dirty="0">
+                <a:hlinkClick r:id="rId3"/>
+              </a:rPr>
+              <a:t>The as-if rule</a:t>
+            </a:r>
+            <a:endParaRPr spc="-25" dirty="0"/>
           </a:p>
         </p:txBody>
       </p:sp>
